--- a/Sprint 13/Final_Project_Presentation.pptx
+++ b/Sprint 13/Final_Project_Presentation.pptx
@@ -1541,7 +1541,7 @@
           <a:p>
             <a:fld id="{D994D154-31B5-4FD1-A1B9-02307A3C9B10}" type="datetime1">
               <a:rPr lang="en-GB" smtClean="0"/>
-              <a:t>18/03/2026</a:t>
+              <a:t>19/03/2026</a:t>
             </a:fld>
             <a:endParaRPr lang="en-GB"/>
           </a:p>
@@ -1721,7 +1721,7 @@
             <a:pPr rtl="0"/>
             <a:fld id="{DAFCCE8E-1C60-4BF7-9129-5412DCAA8F20}" type="datetime1">
               <a:rPr lang="en-GB" smtClean="0"/>
-              <a:t>18/03/2026</a:t>
+              <a:t>19/03/2026</a:t>
             </a:fld>
             <a:endParaRPr lang="en-GB" dirty="0"/>
           </a:p>
@@ -2058,7 +2058,7 @@
             <a:pPr rtl="0"/>
             <a:fld id="{09D495E1-A7DA-4A65-9C69-E86F46E3335E}" type="datetime1">
               <a:rPr lang="en-GB" smtClean="0"/>
-              <a:t>18/03/2026</a:t>
+              <a:t>19/03/2026</a:t>
             </a:fld>
             <a:endParaRPr lang="en-GB" dirty="0"/>
           </a:p>
@@ -20696,7 +20696,23 @@
                   <a:schemeClr val="tx2"/>
                 </a:solidFill>
               </a:rPr>
-              <a:t>Counterfactual confirms the hypothesis</a:t>
+              <a:t>Counterfactual </a:t>
+            </a:r>
+            <a:r>
+              <a:rPr lang="en-US" sz="2200" b="1" dirty="0">
+                <a:solidFill>
+                  <a:schemeClr val="tx2"/>
+                </a:solidFill>
+              </a:rPr>
+              <a:t>partially</a:t>
+            </a:r>
+            <a:r>
+              <a:rPr lang="en-US" sz="2200" dirty="0">
+                <a:solidFill>
+                  <a:schemeClr val="tx2"/>
+                </a:solidFill>
+              </a:rPr>
+              <a:t> confirms the hypothesis</a:t>
             </a:r>
           </a:p>
         </p:txBody>
@@ -22015,7 +22031,7 @@
           <a:p>
             <a:r>
               <a:rPr lang="en-GB" sz="2400" dirty="0"/>
-              <a:t>“This is </a:t>
+              <a:t>This is </a:t>
             </a:r>
             <a:r>
               <a:rPr lang="en-GB" sz="2400" b="1" dirty="0">
@@ -26382,25 +26398,6 @@
 </file>
 
 <file path=customXml/item1.xml><?xml version="1.0" encoding="utf-8"?>
-<p:properties xmlns:p="http://schemas.microsoft.com/office/2006/metadata/properties" xmlns:xsi="http://www.w3.org/2001/XMLSchema-instance" xmlns:pc="http://schemas.microsoft.com/office/infopath/2007/PartnerControls">
-  <documentManagement>
-    <Status xmlns="71af3243-3dd4-4a8d-8c0d-dd76da1f02a5">Not started</Status>
-    <_ip_UnifiedCompliancePolicyUIAction xmlns="http://schemas.microsoft.com/sharepoint/v3" xsi:nil="true"/>
-    <Image xmlns="71af3243-3dd4-4a8d-8c0d-dd76da1f02a5">
-      <Url xsi:nil="true"/>
-      <Description xsi:nil="true"/>
-    </Image>
-    <_ip_UnifiedCompliancePolicyProperties xmlns="http://schemas.microsoft.com/sharepoint/v3" xsi:nil="true"/>
-    <lcf76f155ced4ddcb4097134ff3c332f xmlns="71af3243-3dd4-4a8d-8c0d-dd76da1f02a5">
-      <Terms xmlns="http://schemas.microsoft.com/office/infopath/2007/PartnerControls"/>
-    </lcf76f155ced4ddcb4097134ff3c332f>
-    <TaxCatchAll xmlns="230e9df3-be65-4c73-a93b-d1236ebd677e"/>
-    <MediaServiceKeyPoints xmlns="71af3243-3dd4-4a8d-8c0d-dd76da1f02a5" xsi:nil="true"/>
-  </documentManagement>
-</p:properties>
-</file>
-
-<file path=customXml/item2.xml><?xml version="1.0" encoding="utf-8"?>
 <ct:contentTypeSchema xmlns:ct="http://schemas.microsoft.com/office/2006/metadata/contentType" xmlns:ma="http://schemas.microsoft.com/office/2006/metadata/properties/metaAttributes" ct:_="" ma:_="" ma:contentTypeName="Document" ma:contentTypeID="0x01010079F111ED35F8CC479449609E8A0923A6" ma:contentTypeVersion="18" ma:contentTypeDescription="Create a new document." ma:contentTypeScope="" ma:versionID="22a266b9fa9a230c5a512669d8b298c3">
   <xsd:schema xmlns:xsd="http://www.w3.org/2001/XMLSchema" xmlns:xs="http://www.w3.org/2001/XMLSchema" xmlns:p="http://schemas.microsoft.com/office/2006/metadata/properties" xmlns:ns1="http://schemas.microsoft.com/sharepoint/v3" xmlns:ns2="71af3243-3dd4-4a8d-8c0d-dd76da1f02a5" xmlns:ns3="16c05727-aa75-4e4a-9b5f-8a80a1165891" xmlns:ns4="230e9df3-be65-4c73-a93b-d1236ebd677e" targetNamespace="http://schemas.microsoft.com/office/2006/metadata/properties" ma:root="true" ma:fieldsID="eddc33fff6b14141ee5c74a0d29ea6a1" ns1:_="" ns2:_="" ns3:_="" ns4:_="">
     <xsd:import namespace="http://schemas.microsoft.com/sharepoint/v3"/>
@@ -26676,6 +26673,25 @@
 </ct:contentTypeSchema>
 </file>
 
+<file path=customXml/item2.xml><?xml version="1.0" encoding="utf-8"?>
+<p:properties xmlns:p="http://schemas.microsoft.com/office/2006/metadata/properties" xmlns:xsi="http://www.w3.org/2001/XMLSchema-instance" xmlns:pc="http://schemas.microsoft.com/office/infopath/2007/PartnerControls">
+  <documentManagement>
+    <Status xmlns="71af3243-3dd4-4a8d-8c0d-dd76da1f02a5">Not started</Status>
+    <_ip_UnifiedCompliancePolicyUIAction xmlns="http://schemas.microsoft.com/sharepoint/v3" xsi:nil="true"/>
+    <Image xmlns="71af3243-3dd4-4a8d-8c0d-dd76da1f02a5">
+      <Url xsi:nil="true"/>
+      <Description xsi:nil="true"/>
+    </Image>
+    <_ip_UnifiedCompliancePolicyProperties xmlns="http://schemas.microsoft.com/sharepoint/v3" xsi:nil="true"/>
+    <lcf76f155ced4ddcb4097134ff3c332f xmlns="71af3243-3dd4-4a8d-8c0d-dd76da1f02a5">
+      <Terms xmlns="http://schemas.microsoft.com/office/infopath/2007/PartnerControls"/>
+    </lcf76f155ced4ddcb4097134ff3c332f>
+    <TaxCatchAll xmlns="230e9df3-be65-4c73-a93b-d1236ebd677e"/>
+    <MediaServiceKeyPoints xmlns="71af3243-3dd4-4a8d-8c0d-dd76da1f02a5" xsi:nil="true"/>
+  </documentManagement>
+</p:properties>
+</file>
+
 <file path=customXml/item3.xml><?xml version="1.0" encoding="utf-8"?>
 <?mso-contentType ?>
 <FormTemplates xmlns="http://schemas.microsoft.com/sharepoint/v3/contenttype/forms">
@@ -26686,18 +26702,6 @@
 </file>
 
 <file path=customXml/itemProps1.xml><?xml version="1.0" encoding="utf-8"?>
-<ds:datastoreItem xmlns:ds="http://schemas.openxmlformats.org/officeDocument/2006/customXml" ds:itemID="{B15CABE4-909F-4611-A0E1-6E45080B3C9E}">
-  <ds:schemaRefs>
-    <ds:schemaRef ds:uri="http://schemas.microsoft.com/office/2006/metadata/properties"/>
-    <ds:schemaRef ds:uri="http://schemas.microsoft.com/office/infopath/2007/PartnerControls"/>
-    <ds:schemaRef ds:uri="71af3243-3dd4-4a8d-8c0d-dd76da1f02a5"/>
-    <ds:schemaRef ds:uri="http://schemas.microsoft.com/sharepoint/v3"/>
-    <ds:schemaRef ds:uri="230e9df3-be65-4c73-a93b-d1236ebd677e"/>
-  </ds:schemaRefs>
-</ds:datastoreItem>
-</file>
-
-<file path=customXml/itemProps2.xml><?xml version="1.0" encoding="utf-8"?>
 <ds:datastoreItem xmlns:ds="http://schemas.openxmlformats.org/officeDocument/2006/customXml" ds:itemID="{AA1E8BDE-7A03-4563-82F6-53B214F89568}">
   <ds:schemaRefs>
     <ds:schemaRef ds:uri="http://schemas.microsoft.com/office/2006/metadata/contentType"/>
@@ -26718,6 +26722,18 @@
 </ds:datastoreItem>
 </file>
 
+<file path=customXml/itemProps2.xml><?xml version="1.0" encoding="utf-8"?>
+<ds:datastoreItem xmlns:ds="http://schemas.openxmlformats.org/officeDocument/2006/customXml" ds:itemID="{B15CABE4-909F-4611-A0E1-6E45080B3C9E}">
+  <ds:schemaRefs>
+    <ds:schemaRef ds:uri="http://schemas.microsoft.com/office/2006/metadata/properties"/>
+    <ds:schemaRef ds:uri="http://schemas.microsoft.com/office/infopath/2007/PartnerControls"/>
+    <ds:schemaRef ds:uri="71af3243-3dd4-4a8d-8c0d-dd76da1f02a5"/>
+    <ds:schemaRef ds:uri="http://schemas.microsoft.com/sharepoint/v3"/>
+    <ds:schemaRef ds:uri="230e9df3-be65-4c73-a93b-d1236ebd677e"/>
+  </ds:schemaRefs>
+</ds:datastoreItem>
+</file>
+
 <file path=customXml/itemProps3.xml><?xml version="1.0" encoding="utf-8"?>
 <ds:datastoreItem xmlns:ds="http://schemas.openxmlformats.org/officeDocument/2006/customXml" ds:itemID="{207C1F5B-A1D0-429A-8E7C-3E271353D1E0}">
   <ds:schemaRefs>
